--- a/assets/32_행태_사운드스케이프 리뷰 논문_(LUP)/01_논문작업/Figure.pptx
+++ b/assets/32_행태_사운드스케이프 리뷰 논문_(LUP)/01_논문작업/Figure.pptx
@@ -3882,7 +3882,7 @@
                   <a:latin typeface="Arial" panose="020B0604020202020204" pitchFamily="34" charset="0"/>
                   <a:cs typeface="Arial" panose="020B0604020202020204" pitchFamily="34" charset="0"/>
                 </a:rPr>
-                <a:t>n = 100</a:t>
+                <a:t>n = 183</a:t>
               </a:r>
               <a:endParaRPr lang="ko-KR" altLang="en-US" sz="1400" b="1" spc="-10" dirty="0">
                 <a:solidFill>
@@ -4165,7 +4165,7 @@
                   <a:latin typeface="Arial" panose="020B0604020202020204" pitchFamily="34" charset="0"/>
                   <a:cs typeface="Arial" panose="020B0604020202020204" pitchFamily="34" charset="0"/>
                 </a:rPr>
-                <a:t>n = 89</a:t>
+                <a:t>n = 6</a:t>
               </a:r>
             </a:p>
           </p:txBody>
@@ -4321,7 +4321,7 @@
                   <a:latin typeface="Arial" panose="020B0604020202020204" pitchFamily="34" charset="0"/>
                   <a:cs typeface="Arial" panose="020B0604020202020204" pitchFamily="34" charset="0"/>
                 </a:rPr>
-                <a:t>Setting not eligible (n = 7)</a:t>
+                <a:t>Setting not eligible (n = 41)</a:t>
               </a:r>
             </a:p>
             <a:p>
@@ -4358,7 +4358,7 @@
                   <a:latin typeface="Arial" panose="020B0604020202020204" pitchFamily="34" charset="0"/>
                   <a:cs typeface="Arial" panose="020B0604020202020204" pitchFamily="34" charset="0"/>
                 </a:rPr>
-                <a:t> (n = 6)</a:t>
+                <a:t> (n = 22)</a:t>
               </a:r>
             </a:p>
             <a:p>
@@ -4375,7 +4375,7 @@
                   <a:latin typeface="Arial" panose="020B0604020202020204" pitchFamily="34" charset="0"/>
                   <a:cs typeface="Arial" panose="020B0604020202020204" pitchFamily="34" charset="0"/>
                 </a:rPr>
-                <a:t>Perceptual outcome (n = 1)</a:t>
+                <a:t>No acoustic exposure (n = 16)</a:t>
               </a:r>
             </a:p>
             <a:p>
@@ -4392,7 +4392,7 @@
                   <a:latin typeface="Arial" panose="020B0604020202020204" pitchFamily="34" charset="0"/>
                   <a:cs typeface="Arial" panose="020B0604020202020204" pitchFamily="34" charset="0"/>
                 </a:rPr>
-                <a:t>No acoustic exposure (n = 1)</a:t>
+                <a:t>Not empirical (n = 6)</a:t>
               </a:r>
             </a:p>
             <a:p>
@@ -4409,7 +4409,7 @@
                   <a:latin typeface="Arial" panose="020B0604020202020204" pitchFamily="34" charset="0"/>
                   <a:cs typeface="Arial" panose="020B0604020202020204" pitchFamily="34" charset="0"/>
                 </a:rPr>
-                <a:t>Not empirical (n = 1)</a:t>
+                <a:t>Not a journal article (n = 1)</a:t>
               </a:r>
             </a:p>
             <a:p>
@@ -4426,7 +4426,7 @@
                   <a:latin typeface="Arial" panose="020B0604020202020204" pitchFamily="34" charset="0"/>
                   <a:cs typeface="Arial" panose="020B0604020202020204" pitchFamily="34" charset="0"/>
                 </a:rPr>
-                <a:t>n = 16</a:t>
+                <a:t>n = 86</a:t>
               </a:r>
             </a:p>
           </p:txBody>
@@ -4837,7 +4837,7 @@
                   <a:latin typeface="Arial" panose="020B0604020202020204" pitchFamily="34" charset="0"/>
                   <a:cs typeface="Arial" panose="020B0604020202020204" pitchFamily="34" charset="0"/>
                 </a:rPr>
-                <a:t>n = 59</a:t>
+                <a:t>n = 87</a:t>
               </a:r>
               <a:endParaRPr lang="ko-KR" altLang="en-US" sz="1400" b="1" spc="-10" dirty="0">
                 <a:solidFill>
@@ -5137,7 +5137,7 @@
                   <a:latin typeface="Arial" panose="020B0604020202020204" pitchFamily="34" charset="0"/>
                   <a:cs typeface="Arial" panose="020B0604020202020204" pitchFamily="34" charset="0"/>
                 </a:rPr>
-                <a:t>n = 35</a:t>
+                <a:t>n = 7</a:t>
               </a:r>
             </a:p>
           </p:txBody>
@@ -5221,7 +5221,7 @@
                   <a:latin typeface="Arial" panose="020B0604020202020204" pitchFamily="34" charset="0"/>
                   <a:cs typeface="Arial" panose="020B0604020202020204" pitchFamily="34" charset="0"/>
                 </a:rPr>
-                <a:t>No acoustic variable (n = 20)</a:t>
+                <a:t>No acoustic variable (n = 28)</a:t>
               </a:r>
             </a:p>
             <a:p>
@@ -5258,7 +5258,7 @@
                   <a:latin typeface="Arial" panose="020B0604020202020204" pitchFamily="34" charset="0"/>
                   <a:cs typeface="Arial" panose="020B0604020202020204" pitchFamily="34" charset="0"/>
                 </a:rPr>
-                <a:t> (n = 18)</a:t>
+                <a:t> (n = 26)</a:t>
               </a:r>
             </a:p>
             <a:p>
@@ -5275,7 +5275,7 @@
                   <a:latin typeface="Arial" panose="020B0604020202020204" pitchFamily="34" charset="0"/>
                   <a:cs typeface="Arial" panose="020B0604020202020204" pitchFamily="34" charset="0"/>
                 </a:rPr>
-                <a:t>Not in English (n = 3)</a:t>
+                <a:t>Not in English (n = 4)</a:t>
               </a:r>
             </a:p>
             <a:p>
@@ -5285,6 +5285,40 @@
                 </a:lnSpc>
               </a:pPr>
               <a:r>
+                <a:rPr lang="en-US" altLang="ko-KR" sz="1200" spc="-10" dirty="0">
+                  <a:solidFill>
+                    <a:schemeClr val="tx1"/>
+                  </a:solidFill>
+                  <a:latin typeface="Arial" panose="020B0604020202020204" pitchFamily="34" charset="0"/>
+                  <a:cs typeface="Arial" panose="020B0604020202020204" pitchFamily="34" charset="0"/>
+                </a:rPr>
+                <a:t>Setting not eligible (n = 2)</a:t>
+              </a:r>
+            </a:p>
+            <a:p>
+              <a:pPr algn="ctr">
+                <a:lnSpc>
+                  <a:spcPct val="120000"/>
+                </a:lnSpc>
+              </a:pPr>
+              <a:r>
+                <a:rPr lang="en-US" altLang="ko-KR" sz="1200" spc="-10" dirty="0">
+                  <a:solidFill>
+                    <a:schemeClr val="tx1"/>
+                  </a:solidFill>
+                  <a:latin typeface="Arial" panose="020B0604020202020204" pitchFamily="34" charset="0"/>
+                  <a:cs typeface="Arial" panose="020B0604020202020204" pitchFamily="34" charset="0"/>
+                </a:rPr>
+                <a:t>Not a journal article (n = 2)</a:t>
+              </a:r>
+            </a:p>
+            <a:p>
+              <a:pPr algn="ctr">
+                <a:lnSpc>
+                  <a:spcPct val="120000"/>
+                </a:lnSpc>
+              </a:pPr>
+              <a:r>
                 <a:rPr lang="en-US" altLang="ko-KR" sz="1400" b="1" spc="-10" dirty="0">
                   <a:solidFill>
                     <a:schemeClr val="tx1"/>
@@ -5292,7 +5326,7 @@
                   <a:latin typeface="Arial" panose="020B0604020202020204" pitchFamily="34" charset="0"/>
                   <a:cs typeface="Arial" panose="020B0604020202020204" pitchFamily="34" charset="0"/>
                 </a:rPr>
-                <a:t>n = 41</a:t>
+                <a:t>n = 62</a:t>
               </a:r>
             </a:p>
           </p:txBody>
@@ -5355,7 +5389,7 @@
                   <a:latin typeface="Arial" panose="020B0604020202020204" pitchFamily="34" charset="0"/>
                   <a:cs typeface="Arial" panose="020B0604020202020204" pitchFamily="34" charset="0"/>
                 </a:rPr>
-                <a:t>Studies included in review (n = 98)</a:t>
+                <a:t>Studies included in review (n = 113)</a:t>
               </a:r>
             </a:p>
             <a:p>
@@ -5368,7 +5402,7 @@
                   <a:latin typeface="Arial" panose="020B0604020202020204" pitchFamily="34" charset="0"/>
                   <a:cs typeface="Arial" panose="020B0604020202020204" pitchFamily="34" charset="0"/>
                 </a:rPr>
-                <a:t>Studies used only in sensitivity analyses (n = 4)</a:t>
+                <a:t>Studies used only in sensitivity analyses (n = 9)</a:t>
               </a:r>
             </a:p>
           </p:txBody>
